--- a/classes/parte-13-seguridad-movil-iot-e-inalambrica/270-ataques-a-rfid-y-nfc/clase-270-presentacion.pptx
+++ b/classes/parte-13-seguridad-movil-iot-e-inalambrica/270-ataques-a-rfid-y-nfc/clase-270-presentacion.pptx
@@ -17,6 +17,10 @@
     <p:sldId id="265" r:id="rId16"/>
     <p:sldId id="266" r:id="rId17"/>
     <p:sldId id="267" r:id="rId18"/>
+    <p:sldId id="268" r:id="rId19"/>
+    <p:sldId id="269" r:id="rId20"/>
+    <p:sldId id="270" r:id="rId21"/>
+    <p:sldId id="271" r:id="rId22"/>
   </p:sldIdLst>
   <p:sldSz cx="9144000" cy="6858000" type="screen4x3"/>
   <p:notesSz cx="6858000" cy="9144000"/>
@@ -3198,7 +3202,7 @@
                   <a:srgbClr val="0B3D2E"/>
                 </a:solidFill>
               </a:rPr>
-              <a:t>⚠️ Errores comunes</a:t>
+              <a:t>🧪 Laboratorio guiado</a:t>
             </a:r>
           </a:p>
         </p:txBody>
@@ -3236,67 +3240,97 @@
                   <a:srgbClr val="22282E"/>
                 </a:solidFill>
               </a:rPr>
-              <a:t>•  hf search no detecta nada — Tag HF fuera de antena o es LF; prueba lf search</a:t>
-            </a:r>
-          </a:p>
-          <a:p>
-            <a:pPr>
-              <a:spcAft>
-                <a:spcPts val="600"/>
-              </a:spcAft>
-            </a:pPr>
-            <a:r>
-              <a:rPr sz="1500">
-                <a:solidFill>
-                  <a:srgbClr val="22282E"/>
-                </a:solidFill>
-              </a:rPr>
-              <a:t>•  autopwn no recupera claves — Tarjeta no es Classic (DESFire) o hardened; usa otra técnica</a:t>
-            </a:r>
-          </a:p>
-          <a:p>
-            <a:pPr>
-              <a:spcAft>
-                <a:spcPts val="600"/>
-              </a:spcAft>
-            </a:pPr>
-            <a:r>
-              <a:rPr sz="1500">
-                <a:solidFill>
-                  <a:srgbClr val="22282E"/>
-                </a:solidFill>
-              </a:rPr>
-              <a:t>•  Clon no funciona en el lector — El backend valida más que el UID; clona todos los sectores</a:t>
-            </a:r>
-          </a:p>
-          <a:p>
-            <a:pPr>
-              <a:spcAft>
-                <a:spcPts val="600"/>
-              </a:spcAft>
-            </a:pPr>
-            <a:r>
-              <a:rPr sz="1500">
-                <a:solidFill>
-                  <a:srgbClr val="22282E"/>
-                </a:solidFill>
-              </a:rPr>
-              <a:t>•  Magic card rechaza el UID — Tipo de magic (gen1a/gen2) equivocado; usa el comando adecuado</a:t>
-            </a:r>
-          </a:p>
-          <a:p>
-            <a:pPr>
-              <a:spcAft>
-                <a:spcPts val="600"/>
-              </a:spcAft>
-            </a:pPr>
-            <a:r>
-              <a:rPr sz="1500">
-                <a:solidFill>
-                  <a:srgbClr val="22282E"/>
-                </a:solidFill>
-              </a:rPr>
-              <a:t>•  Lecturas intermitentes — Mala posición/antena; centra el tag sobre la antena</a:t>
+              <a:t>•  Identifica tus tags: con lf search y hf search determina la tecnología de tarjetas propias.</a:t>
+            </a:r>
+          </a:p>
+          <a:p>
+            <a:pPr>
+              <a:spcAft>
+                <a:spcPts val="600"/>
+              </a:spcAft>
+            </a:pPr>
+            <a:r>
+              <a:rPr sz="1500">
+                <a:solidFill>
+                  <a:srgbClr val="22282E"/>
+                </a:solidFill>
+              </a:rPr>
+              <a:t>•  LF simple: lee un EM4100 propio (lf em 410x reader) y observa que solo entrega un ID.</a:t>
+            </a:r>
+          </a:p>
+          <a:p>
+            <a:pPr>
+              <a:spcAft>
+                <a:spcPts val="600"/>
+              </a:spcAft>
+            </a:pPr>
+            <a:r>
+              <a:rPr sz="1500">
+                <a:solidFill>
+                  <a:srgbClr val="22282E"/>
+                </a:solidFill>
+              </a:rPr>
+              <a:t>•  HF/NFC: con hf 14a info obtén UID, ATQA/SAK y el tipo de MIFARE.</a:t>
+            </a:r>
+          </a:p>
+          <a:p>
+            <a:pPr>
+              <a:spcAft>
+                <a:spcPts val="600"/>
+              </a:spcAft>
+            </a:pPr>
+            <a:r>
+              <a:rPr sz="1500">
+                <a:solidFill>
+                  <a:srgbClr val="22282E"/>
+                </a:solidFill>
+              </a:rPr>
+              <a:t>•  Ataca MIFARE Classic (propia): ejecuta hf mf autopwn (o mfoc) para recuperar claves de los sectores.</a:t>
+            </a:r>
+          </a:p>
+          <a:p>
+            <a:pPr>
+              <a:spcAft>
+                <a:spcPts val="600"/>
+              </a:spcAft>
+            </a:pPr>
+            <a:r>
+              <a:rPr sz="1500">
+                <a:solidFill>
+                  <a:srgbClr val="22282E"/>
+                </a:solidFill>
+              </a:rPr>
+              <a:t>•  Vuelca la tarjeta: genera el dump completo y ábrelo para inspeccionar los datos de los bloques.</a:t>
+            </a:r>
+          </a:p>
+          <a:p>
+            <a:pPr>
+              <a:spcAft>
+                <a:spcPts val="600"/>
+              </a:spcAft>
+            </a:pPr>
+            <a:r>
+              <a:rPr sz="1500">
+                <a:solidFill>
+                  <a:srgbClr val="22282E"/>
+                </a:solidFill>
+              </a:rPr>
+              <a:t>•  Clona a magic card: escribe el dump y fija el UID en una magic card y verifica que el lector la reconoce igual.</a:t>
+            </a:r>
+          </a:p>
+          <a:p>
+            <a:pPr>
+              <a:spcAft>
+                <a:spcPts val="600"/>
+              </a:spcAft>
+            </a:pPr>
+            <a:r>
+              <a:rPr sz="1500">
+                <a:solidFill>
+                  <a:srgbClr val="22282E"/>
+                </a:solidFill>
+              </a:rPr>
+              <a:t>•  Analiza NTAG/NDEF: lee un tag NTAG213 propio y su registro NDEF con NFC Tools.</a:t>
             </a:r>
           </a:p>
         </p:txBody>
@@ -3347,7 +3381,7 @@
                   <a:srgbClr val="0B3D2E"/>
                 </a:solidFill>
               </a:rPr>
-              <a:t>❓ Preguntas frecuentes</a:t>
+              <a:t>✍️ Ejercicios</a:t>
             </a:r>
           </a:p>
         </p:txBody>
@@ -3385,82 +3419,82 @@
                   <a:srgbClr val="22282E"/>
                 </a:solidFill>
               </a:rPr>
-              <a:t>•  ❓ ¿Por qué MIFARE Classic sigue en uso si su cifrado está roto?</a:t>
-            </a:r>
-          </a:p>
-          <a:p>
-            <a:pPr>
-              <a:spcAft>
-                <a:spcPts val="600"/>
-              </a:spcAft>
-            </a:pPr>
-            <a:r>
-              <a:rPr sz="1500">
-                <a:solidFill>
-                  <a:srgbClr val="22282E"/>
-                </a:solidFill>
-              </a:rPr>
-              <a:t>•  Por costo e inercia de despliegue. Muchos sistemas heredados no se han migrado, aunque las alternativas seguras (DESFire) existen desde hace años.</a:t>
-            </a:r>
-          </a:p>
-          <a:p>
-            <a:pPr>
-              <a:spcAft>
-                <a:spcPts val="600"/>
-              </a:spcAft>
-            </a:pPr>
-            <a:r>
-              <a:rPr sz="1500">
-                <a:solidFill>
-                  <a:srgbClr val="22282E"/>
-                </a:solidFill>
-              </a:rPr>
-              <a:t>•  ❓ ¿Clonar un tag LF es realmente tan fácil?</a:t>
-            </a:r>
-          </a:p>
-          <a:p>
-            <a:pPr>
-              <a:spcAft>
-                <a:spcPts val="600"/>
-              </a:spcAft>
-            </a:pPr>
-            <a:r>
-              <a:rPr sz="1500">
-                <a:solidFill>
-                  <a:srgbClr val="22282E"/>
-                </a:solidFill>
-              </a:rPr>
-              <a:t>•  Sí: la mayoría solo emite un ID sin autenticación, así que leerlo y reescribirlo en un tag regrabable basta. Por eso no debe usarse como único control de acceso.</a:t>
-            </a:r>
-          </a:p>
-          <a:p>
-            <a:pPr>
-              <a:spcAft>
-                <a:spcPts val="600"/>
-              </a:spcAft>
-            </a:pPr>
-            <a:r>
-              <a:rPr sz="1500">
-                <a:solidFill>
-                  <a:srgbClr val="22282E"/>
-                </a:solidFill>
-              </a:rPr>
-              <a:t>•  ❓ ¿Puedo clonar tarjetas de pago o transporte con esto?</a:t>
-            </a:r>
-          </a:p>
-          <a:p>
-            <a:pPr>
-              <a:spcAft>
-                <a:spcPts val="600"/>
-              </a:spcAft>
-            </a:pPr>
-            <a:r>
-              <a:rPr sz="1500">
-                <a:solidFill>
-                  <a:srgbClr val="22282E"/>
-                </a:solidFill>
-              </a:rPr>
-              <a:t>•  No de forma útil ni legal: los sistemas de pago usan criptografía fuerte y validación en backend; intentarlo es fraude.</a:t>
+              <a:t>•  Identifica y clasifica tres tags propios por frecuencia y estándar.</a:t>
+            </a:r>
+          </a:p>
+          <a:p>
+            <a:pPr>
+              <a:spcAft>
+                <a:spcPts val="600"/>
+              </a:spcAft>
+            </a:pPr>
+            <a:r>
+              <a:rPr sz="1500">
+                <a:solidFill>
+                  <a:srgbClr val="22282E"/>
+                </a:solidFill>
+              </a:rPr>
+              <a:t>•  Extrae el ID de un tag LF EM4100 propio.</a:t>
+            </a:r>
+          </a:p>
+          <a:p>
+            <a:pPr>
+              <a:spcAft>
+                <a:spcPts val="600"/>
+              </a:spcAft>
+            </a:pPr>
+            <a:r>
+              <a:rPr sz="1500">
+                <a:solidFill>
+                  <a:srgbClr val="22282E"/>
+                </a:solidFill>
+              </a:rPr>
+              <a:t>•  Recupera las claves de una MIFARE Classic propia y explica qué ataque se usó.</a:t>
+            </a:r>
+          </a:p>
+          <a:p>
+            <a:pPr>
+              <a:spcAft>
+                <a:spcPts val="600"/>
+              </a:spcAft>
+            </a:pPr>
+            <a:r>
+              <a:rPr sz="1500">
+                <a:solidFill>
+                  <a:srgbClr val="22282E"/>
+                </a:solidFill>
+              </a:rPr>
+              <a:t>•  Vuelca y analiza los sectores de una tarjeta propia.</a:t>
+            </a:r>
+          </a:p>
+          <a:p>
+            <a:pPr>
+              <a:spcAft>
+                <a:spcPts val="600"/>
+              </a:spcAft>
+            </a:pPr>
+            <a:r>
+              <a:rPr sz="1500">
+                <a:solidFill>
+                  <a:srgbClr val="22282E"/>
+                </a:solidFill>
+              </a:rPr>
+              <a:t>•  Clona un tag propio a una magic card y verifica la lectura.</a:t>
+            </a:r>
+          </a:p>
+          <a:p>
+            <a:pPr>
+              <a:spcAft>
+                <a:spcPts val="600"/>
+              </a:spcAft>
+            </a:pPr>
+            <a:r>
+              <a:rPr sz="1500">
+                <a:solidFill>
+                  <a:srgbClr val="22282E"/>
+                </a:solidFill>
+              </a:rPr>
+              <a:t>•  Redacta tres recomendaciones para endurecer un sistema de acceso por proximidad.</a:t>
             </a:r>
           </a:p>
         </p:txBody>
@@ -3511,7 +3545,7 @@
                   <a:srgbClr val="0B3D2E"/>
                 </a:solidFill>
               </a:rPr>
-              <a:t>🔗 Referencias</a:t>
+              <a:t>📝 Reto verificable</a:t>
             </a:r>
           </a:p>
         </p:txBody>
@@ -3549,6 +3583,408 @@
                   <a:srgbClr val="22282E"/>
                 </a:solidFill>
               </a:rPr>
+              <a:t>•  Recupera todas las claves de una tarjeta MIFARE Classic de tu propiedad, vuelca su contenido y clónala a una magic card. Criterio de aceptación: el clon es reconocido por el mismo lector que la…</a:t>
+            </a:r>
+          </a:p>
+        </p:txBody>
+      </p:sp>
+    </p:spTree>
+  </p:cSld>
+  <p:clrMapOvr>
+    <a:masterClrMapping/>
+  </p:clrMapOvr>
+</p:sld>
+</file>
+
+<file path=ppt/slides/slide13.xml><?xml version="1.0" encoding="utf-8"?>
+<p:sld xmlns:a="http://schemas.openxmlformats.org/drawingml/2006/main" xmlns:p="http://schemas.openxmlformats.org/presentationml/2006/main" xmlns:r="http://schemas.openxmlformats.org/officeDocument/2006/relationships">
+  <p:cSld>
+    <p:spTree>
+      <p:nvGrpSpPr>
+        <p:cNvPr id="1" name=""/>
+        <p:cNvGrpSpPr/>
+        <p:nvPr/>
+      </p:nvGrpSpPr>
+      <p:grpSpPr/>
+      <p:sp>
+        <p:nvSpPr>
+          <p:cNvPr id="2" name="TextBox 1"/>
+          <p:cNvSpPr txBox="1"/>
+          <p:nvPr/>
+        </p:nvSpPr>
+        <p:spPr>
+          <a:xfrm>
+            <a:off x="457200" y="320040"/>
+            <a:ext cx="8229600" cy="822960"/>
+          </a:xfrm>
+          <a:prstGeom prst="rect">
+            <a:avLst/>
+          </a:prstGeom>
+          <a:noFill/>
+        </p:spPr>
+        <p:txBody>
+          <a:bodyPr wrap="square">
+            <a:spAutoFit/>
+          </a:bodyPr>
+          <a:lstStyle/>
+          <a:p>
+            <a:r>
+              <a:rPr sz="2600" b="1">
+                <a:solidFill>
+                  <a:srgbClr val="0B3D2E"/>
+                </a:solidFill>
+              </a:rPr>
+              <a:t>⚠️ Errores comunes</a:t>
+            </a:r>
+          </a:p>
+        </p:txBody>
+      </p:sp>
+      <p:sp>
+        <p:nvSpPr>
+          <p:cNvPr id="3" name="TextBox 2"/>
+          <p:cNvSpPr txBox="1"/>
+          <p:nvPr/>
+        </p:nvSpPr>
+        <p:spPr>
+          <a:xfrm>
+            <a:off x="457200" y="1280160"/>
+            <a:ext cx="8229600" cy="4937760"/>
+          </a:xfrm>
+          <a:prstGeom prst="rect">
+            <a:avLst/>
+          </a:prstGeom>
+          <a:noFill/>
+        </p:spPr>
+        <p:txBody>
+          <a:bodyPr wrap="square">
+            <a:spAutoFit/>
+          </a:bodyPr>
+          <a:lstStyle/>
+          <a:p>
+            <a:pPr>
+              <a:spcAft>
+                <a:spcPts val="600"/>
+              </a:spcAft>
+            </a:pPr>
+            <a:r>
+              <a:rPr sz="1500">
+                <a:solidFill>
+                  <a:srgbClr val="22282E"/>
+                </a:solidFill>
+              </a:rPr>
+              <a:t>•  hf search no detecta nada — Tag HF fuera de antena o es LF; prueba lf search</a:t>
+            </a:r>
+          </a:p>
+          <a:p>
+            <a:pPr>
+              <a:spcAft>
+                <a:spcPts val="600"/>
+              </a:spcAft>
+            </a:pPr>
+            <a:r>
+              <a:rPr sz="1500">
+                <a:solidFill>
+                  <a:srgbClr val="22282E"/>
+                </a:solidFill>
+              </a:rPr>
+              <a:t>•  autopwn no recupera claves — Tarjeta no es Classic (DESFire) o hardened; usa otra técnica</a:t>
+            </a:r>
+          </a:p>
+          <a:p>
+            <a:pPr>
+              <a:spcAft>
+                <a:spcPts val="600"/>
+              </a:spcAft>
+            </a:pPr>
+            <a:r>
+              <a:rPr sz="1500">
+                <a:solidFill>
+                  <a:srgbClr val="22282E"/>
+                </a:solidFill>
+              </a:rPr>
+              <a:t>•  La emulación de UID no funciona en el lector — El sistema valida memoria, autenticación, estado o backend. Documenta qué capa rechazó la tarjeta; no intentes copiar una credencial real.</a:t>
+            </a:r>
+          </a:p>
+          <a:p>
+            <a:pPr>
+              <a:spcAft>
+                <a:spcPts val="600"/>
+              </a:spcAft>
+            </a:pPr>
+            <a:r>
+              <a:rPr sz="1500">
+                <a:solidFill>
+                  <a:srgbClr val="22282E"/>
+                </a:solidFill>
+              </a:rPr>
+              <a:t>•  Magic card rechaza el UID — Tipo de magic (gen1a/gen2) equivocado; usa el comando adecuado</a:t>
+            </a:r>
+          </a:p>
+          <a:p>
+            <a:pPr>
+              <a:spcAft>
+                <a:spcPts val="600"/>
+              </a:spcAft>
+            </a:pPr>
+            <a:r>
+              <a:rPr sz="1500">
+                <a:solidFill>
+                  <a:srgbClr val="22282E"/>
+                </a:solidFill>
+              </a:rPr>
+              <a:t>•  Lecturas intermitentes — Mala posición/antena; centra el tag sobre la antena</a:t>
+            </a:r>
+          </a:p>
+        </p:txBody>
+      </p:sp>
+    </p:spTree>
+  </p:cSld>
+  <p:clrMapOvr>
+    <a:masterClrMapping/>
+  </p:clrMapOvr>
+</p:sld>
+</file>
+
+<file path=ppt/slides/slide14.xml><?xml version="1.0" encoding="utf-8"?>
+<p:sld xmlns:a="http://schemas.openxmlformats.org/drawingml/2006/main" xmlns:p="http://schemas.openxmlformats.org/presentationml/2006/main" xmlns:r="http://schemas.openxmlformats.org/officeDocument/2006/relationships">
+  <p:cSld>
+    <p:spTree>
+      <p:nvGrpSpPr>
+        <p:cNvPr id="1" name=""/>
+        <p:cNvGrpSpPr/>
+        <p:nvPr/>
+      </p:nvGrpSpPr>
+      <p:grpSpPr/>
+      <p:sp>
+        <p:nvSpPr>
+          <p:cNvPr id="2" name="TextBox 1"/>
+          <p:cNvSpPr txBox="1"/>
+          <p:nvPr/>
+        </p:nvSpPr>
+        <p:spPr>
+          <a:xfrm>
+            <a:off x="457200" y="320040"/>
+            <a:ext cx="8229600" cy="822960"/>
+          </a:xfrm>
+          <a:prstGeom prst="rect">
+            <a:avLst/>
+          </a:prstGeom>
+          <a:noFill/>
+        </p:spPr>
+        <p:txBody>
+          <a:bodyPr wrap="square">
+            <a:spAutoFit/>
+          </a:bodyPr>
+          <a:lstStyle/>
+          <a:p>
+            <a:r>
+              <a:rPr sz="2600" b="1">
+                <a:solidFill>
+                  <a:srgbClr val="0B3D2E"/>
+                </a:solidFill>
+              </a:rPr>
+              <a:t>❓ Preguntas frecuentes</a:t>
+            </a:r>
+          </a:p>
+        </p:txBody>
+      </p:sp>
+      <p:sp>
+        <p:nvSpPr>
+          <p:cNvPr id="3" name="TextBox 2"/>
+          <p:cNvSpPr txBox="1"/>
+          <p:nvPr/>
+        </p:nvSpPr>
+        <p:spPr>
+          <a:xfrm>
+            <a:off x="457200" y="1280160"/>
+            <a:ext cx="8229600" cy="4937760"/>
+          </a:xfrm>
+          <a:prstGeom prst="rect">
+            <a:avLst/>
+          </a:prstGeom>
+          <a:noFill/>
+        </p:spPr>
+        <p:txBody>
+          <a:bodyPr wrap="square">
+            <a:spAutoFit/>
+          </a:bodyPr>
+          <a:lstStyle/>
+          <a:p>
+            <a:pPr>
+              <a:spcAft>
+                <a:spcPts val="600"/>
+              </a:spcAft>
+            </a:pPr>
+            <a:r>
+              <a:rPr sz="1500">
+                <a:solidFill>
+                  <a:srgbClr val="22282E"/>
+                </a:solidFill>
+              </a:rPr>
+              <a:t>•  ❓ ¿Por qué MIFARE Classic sigue en uso si su cifrado está roto?</a:t>
+            </a:r>
+          </a:p>
+          <a:p>
+            <a:pPr>
+              <a:spcAft>
+                <a:spcPts val="600"/>
+              </a:spcAft>
+            </a:pPr>
+            <a:r>
+              <a:rPr sz="1500">
+                <a:solidFill>
+                  <a:srgbClr val="22282E"/>
+                </a:solidFill>
+              </a:rPr>
+              <a:t>•  Por costo e inercia de despliegue. Muchos sistemas heredados no se han migrado, aunque las alternativas seguras (DESFire) existen desde hace años.</a:t>
+            </a:r>
+          </a:p>
+          <a:p>
+            <a:pPr>
+              <a:spcAft>
+                <a:spcPts val="600"/>
+              </a:spcAft>
+            </a:pPr>
+            <a:r>
+              <a:rPr sz="1500">
+                <a:solidFill>
+                  <a:srgbClr val="22282E"/>
+                </a:solidFill>
+              </a:rPr>
+              <a:t>•  ❓ ¿Clonar un tag LF es realmente tan fácil?</a:t>
+            </a:r>
+          </a:p>
+          <a:p>
+            <a:pPr>
+              <a:spcAft>
+                <a:spcPts val="600"/>
+              </a:spcAft>
+            </a:pPr>
+            <a:r>
+              <a:rPr sz="1500">
+                <a:solidFill>
+                  <a:srgbClr val="22282E"/>
+                </a:solidFill>
+              </a:rPr>
+              <a:t>•  Sí: la mayoría solo emite un ID sin autenticación, así que leerlo y reescribirlo en un tag regrabable basta. Por eso no debe usarse como único control de acceso.</a:t>
+            </a:r>
+          </a:p>
+          <a:p>
+            <a:pPr>
+              <a:spcAft>
+                <a:spcPts val="600"/>
+              </a:spcAft>
+            </a:pPr>
+            <a:r>
+              <a:rPr sz="1500">
+                <a:solidFill>
+                  <a:srgbClr val="22282E"/>
+                </a:solidFill>
+              </a:rPr>
+              <a:t>•  ❓ ¿Puedo clonar tarjetas de pago o transporte con esto?</a:t>
+            </a:r>
+          </a:p>
+          <a:p>
+            <a:pPr>
+              <a:spcAft>
+                <a:spcPts val="600"/>
+              </a:spcAft>
+            </a:pPr>
+            <a:r>
+              <a:rPr sz="1500">
+                <a:solidFill>
+                  <a:srgbClr val="22282E"/>
+                </a:solidFill>
+              </a:rPr>
+              <a:t>•  No de forma útil ni legal: los sistemas de pago usan criptografía fuerte y validación en backend; intentarlo es fraude.</a:t>
+            </a:r>
+          </a:p>
+        </p:txBody>
+      </p:sp>
+    </p:spTree>
+  </p:cSld>
+  <p:clrMapOvr>
+    <a:masterClrMapping/>
+  </p:clrMapOvr>
+</p:sld>
+</file>
+
+<file path=ppt/slides/slide15.xml><?xml version="1.0" encoding="utf-8"?>
+<p:sld xmlns:a="http://schemas.openxmlformats.org/drawingml/2006/main" xmlns:p="http://schemas.openxmlformats.org/presentationml/2006/main" xmlns:r="http://schemas.openxmlformats.org/officeDocument/2006/relationships">
+  <p:cSld>
+    <p:spTree>
+      <p:nvGrpSpPr>
+        <p:cNvPr id="1" name=""/>
+        <p:cNvGrpSpPr/>
+        <p:nvPr/>
+      </p:nvGrpSpPr>
+      <p:grpSpPr/>
+      <p:sp>
+        <p:nvSpPr>
+          <p:cNvPr id="2" name="TextBox 1"/>
+          <p:cNvSpPr txBox="1"/>
+          <p:nvPr/>
+        </p:nvSpPr>
+        <p:spPr>
+          <a:xfrm>
+            <a:off x="457200" y="320040"/>
+            <a:ext cx="8229600" cy="822960"/>
+          </a:xfrm>
+          <a:prstGeom prst="rect">
+            <a:avLst/>
+          </a:prstGeom>
+          <a:noFill/>
+        </p:spPr>
+        <p:txBody>
+          <a:bodyPr wrap="square">
+            <a:spAutoFit/>
+          </a:bodyPr>
+          <a:lstStyle/>
+          <a:p>
+            <a:r>
+              <a:rPr sz="2600" b="1">
+                <a:solidFill>
+                  <a:srgbClr val="0B3D2E"/>
+                </a:solidFill>
+              </a:rPr>
+              <a:t>🔗 Referencias</a:t>
+            </a:r>
+          </a:p>
+        </p:txBody>
+      </p:sp>
+      <p:sp>
+        <p:nvSpPr>
+          <p:cNvPr id="3" name="TextBox 2"/>
+          <p:cNvSpPr txBox="1"/>
+          <p:nvPr/>
+        </p:nvSpPr>
+        <p:spPr>
+          <a:xfrm>
+            <a:off x="457200" y="1280160"/>
+            <a:ext cx="8229600" cy="4937760"/>
+          </a:xfrm>
+          <a:prstGeom prst="rect">
+            <a:avLst/>
+          </a:prstGeom>
+          <a:noFill/>
+        </p:spPr>
+        <p:txBody>
+          <a:bodyPr wrap="square">
+            <a:spAutoFit/>
+          </a:bodyPr>
+          <a:lstStyle/>
+          <a:p>
+            <a:pPr>
+              <a:spcAft>
+                <a:spcPts val="600"/>
+              </a:spcAft>
+            </a:pPr>
+            <a:r>
+              <a:rPr sz="1500">
+                <a:solidFill>
+                  <a:srgbClr val="22282E"/>
+                </a:solidFill>
+              </a:rPr>
               <a:t>•  Proxmark3 (Iceman): &lt;https://github.com/RfidResearchGroup/proxmark3&gt;</a:t>
             </a:r>
           </a:p>
@@ -3599,6 +4035,81 @@
           </a:p>
         </p:txBody>
       </p:sp>
+    </p:spTree>
+  </p:cSld>
+  <p:clrMapOvr>
+    <a:masterClrMapping/>
+  </p:clrMapOvr>
+</p:sld>
+</file>
+
+<file path=ppt/slides/slide16.xml><?xml version="1.0" encoding="utf-8"?>
+<p:sld xmlns:a="http://schemas.openxmlformats.org/drawingml/2006/main" xmlns:p="http://schemas.openxmlformats.org/presentationml/2006/main" xmlns:r="http://schemas.openxmlformats.org/officeDocument/2006/relationships">
+  <p:cSld>
+    <p:spTree>
+      <p:nvGrpSpPr>
+        <p:cNvPr id="1" name=""/>
+        <p:cNvGrpSpPr/>
+        <p:nvPr/>
+      </p:nvGrpSpPr>
+      <p:grpSpPr/>
+      <p:sp>
+        <p:nvSpPr>
+          <p:cNvPr id="2" name="TextBox 1"/>
+          <p:cNvSpPr txBox="1"/>
+          <p:nvPr/>
+        </p:nvSpPr>
+        <p:spPr>
+          <a:xfrm>
+            <a:off x="457200" y="274320"/>
+            <a:ext cx="8229600" cy="640080"/>
+          </a:xfrm>
+          <a:prstGeom prst="rect">
+            <a:avLst/>
+          </a:prstGeom>
+          <a:noFill/>
+        </p:spPr>
+        <p:txBody>
+          <a:bodyPr wrap="square">
+            <a:spAutoFit/>
+          </a:bodyPr>
+          <a:lstStyle/>
+          <a:p>
+            <a:r>
+              <a:rPr sz="2200" b="1">
+                <a:solidFill>
+                  <a:srgbClr val="0B3D2E"/>
+                </a:solidFill>
+              </a:rPr>
+              <a:t>Diagrama de la clase</a:t>
+            </a:r>
+          </a:p>
+        </p:txBody>
+      </p:sp>
+      <p:pic>
+        <p:nvPicPr>
+          <p:cNvPr id="3" name="Picture 2" descr="31a62510110e14bf.png"/>
+          <p:cNvPicPr>
+            <a:picLocks noChangeAspect="1"/>
+          </p:cNvPicPr>
+          <p:nvPr/>
+        </p:nvPicPr>
+        <p:blipFill>
+          <a:blip r:embed="rId2"/>
+          <a:stretch>
+            <a:fillRect/>
+          </a:stretch>
+        </p:blipFill>
+        <p:spPr>
+          <a:xfrm>
+            <a:off x="457200" y="2953512"/>
+            <a:ext cx="8229600" cy="1591056"/>
+          </a:xfrm>
+          <a:prstGeom prst="rect">
+            <a:avLst/>
+          </a:prstGeom>
+        </p:spPr>
+      </p:pic>
     </p:spTree>
   </p:cSld>
   <p:clrMapOvr>
@@ -3683,7 +4194,7 @@
                   <a:srgbClr val="22282E"/>
                 </a:solidFill>
               </a:rPr>
-              <a:t>•  Comprender y auditar tecnologías RFID de baja frecuencia (125 kHz) y alta frecuencia/NFC (13.56 MHz): cómo funcionan las tarjetas de acceso y de transporte, sus debilidades criptográficas históricas (MIFARE Classic/Crypto-1), y cómo leer, analizar y clonar tags propios con un Proxmark3. El alumno también entenderá los riesgos de los sistemas de control de acceso basados en credenciales de proximidad y cómo endurecerlos.</a:t>
+              <a:t>•  Comprender y auditar tecnologías RFID de baja frecuencia (125 kHz) y alta frecuencia/NFC (13.56 MHz): cómo funcionan las tarjetas de acceso y de transporte, sus debilidades criptográficas históricas…</a:t>
             </a:r>
           </a:p>
         </p:txBody>
@@ -4092,7 +4603,7 @@
                   <a:srgbClr val="0B3D2E"/>
                 </a:solidFill>
               </a:rPr>
-              <a:t>📖 Definiciones y características</a:t>
+              <a:t>🧠 Explicación en profundidad</a:t>
             </a:r>
           </a:p>
         </p:txBody>
@@ -4130,82 +4641,52 @@
                   <a:srgbClr val="22282E"/>
                 </a:solidFill>
               </a:rPr>
-              <a:t>•  RFID LF (125 kHz): tags simples tipo EM4100/HID Prox que suelen transmitir solo un ID sin cifrado. Característica: clonables trivialmente.</a:t>
-            </a:r>
-          </a:p>
-          <a:p>
-            <a:pPr>
-              <a:spcAft>
-                <a:spcPts val="600"/>
-              </a:spcAft>
-            </a:pPr>
-            <a:r>
-              <a:rPr sz="1500">
-                <a:solidFill>
-                  <a:srgbClr val="22282E"/>
-                </a:solidFill>
-              </a:rPr>
-              <a:t>•  NFC (13.56 MHz): subconjunto de HF para comunicación de corto alcance (pagos, tags NTAG). Característica: soportado por smartphones.</a:t>
-            </a:r>
-          </a:p>
-          <a:p>
-            <a:pPr>
-              <a:spcAft>
-                <a:spcPts val="600"/>
-              </a:spcAft>
-            </a:pPr>
-            <a:r>
-              <a:rPr sz="1500">
-                <a:solidFill>
-                  <a:srgbClr val="22282E"/>
-                </a:solidFill>
-              </a:rPr>
-              <a:t>•  MIFARE Classic: tarjeta HF con el cifrado propietario Crypto-1. Característica: roto; sus claves se recuperan en segundos/minutos.</a:t>
-            </a:r>
-          </a:p>
-          <a:p>
-            <a:pPr>
-              <a:spcAft>
-                <a:spcPts val="600"/>
-              </a:spcAft>
-            </a:pPr>
-            <a:r>
-              <a:rPr sz="1500">
-                <a:solidFill>
-                  <a:srgbClr val="22282E"/>
-                </a:solidFill>
-              </a:rPr>
-              <a:t>•  Proxmark3: herramienta versátil de lectura/escritura/emulación RFID LF y HF. Característica: soporta ataques a MIFARE y clonado.</a:t>
-            </a:r>
-          </a:p>
-          <a:p>
-            <a:pPr>
-              <a:spcAft>
-                <a:spcPts val="600"/>
-              </a:spcAft>
-            </a:pPr>
-            <a:r>
-              <a:rPr sz="1500">
-                <a:solidFill>
-                  <a:srgbClr val="22282E"/>
-                </a:solidFill>
-              </a:rPr>
-              <a:t>•  Ataque nested/darkside: técnicas que explotan debilidades de Crypto-1 para recuperar claves de sectores. Característica: requieren al menos una clave o son de fuerza reducida.</a:t>
-            </a:r>
-          </a:p>
-          <a:p>
-            <a:pPr>
-              <a:spcAft>
-                <a:spcPts val="600"/>
-              </a:spcAft>
-            </a:pPr>
-            <a:r>
-              <a:rPr sz="1500">
-                <a:solidFill>
-                  <a:srgbClr val="22282E"/>
-                </a:solidFill>
-              </a:rPr>
-              <a:t>•  Magic card: tarjeta con bloque 0 regrabable que permite fijar un UID arbitrario. Característica: usada para clonar MIFARE Classic.</a:t>
+              <a:t>•  RFID agrupa tecnologías distintas; NFC opera a corta distancia en 13,56 MHz y define modos e interoperabilidad. Una tarjeta puede emitir un identificador fijo, autenticar criptográficamente o…</a:t>
+            </a:r>
+          </a:p>
+          <a:p>
+            <a:pPr>
+              <a:spcAft>
+                <a:spcPts val="600"/>
+              </a:spcAft>
+            </a:pPr>
+            <a:r>
+              <a:rPr sz="1500">
+                <a:solidFill>
+                  <a:srgbClr val="22282E"/>
+                </a:solidFill>
+              </a:rPr>
+              <a:t>•  El diagrama coloca la decisión fuera del medio físico. Un sistema que autoriza solo por UID hereda riesgo de copia; uno con desafío-respuesta debe proteger claves y evitar replay; el backend puede…</a:t>
+            </a:r>
+          </a:p>
+          <a:p>
+            <a:pPr>
+              <a:spcAft>
+                <a:spcPts val="600"/>
+              </a:spcAft>
+            </a:pPr>
+            <a:r>
+              <a:rPr sz="1500">
+                <a:solidFill>
+                  <a:srgbClr val="22282E"/>
+                </a:solidFill>
+              </a:rPr>
+              <a:t>•  El laboratorio utiliza tarjetas compradas para práctica y un lector propio, sin credenciales de transporte, pago o acceso real. Se identifica tecnología, se lee información pública, se cambia una…</a:t>
+            </a:r>
+          </a:p>
+          <a:p>
+            <a:pPr>
+              <a:spcAft>
+                <a:spcPts val="600"/>
+              </a:spcAft>
+            </a:pPr>
+            <a:r>
+              <a:rPr sz="1500">
+                <a:solidFill>
+                  <a:srgbClr val="22282E"/>
+                </a:solidFill>
+              </a:rPr>
+              <a:t>•  Un emulador presenta el mismo UID, pero el lector exige respuesta criptográfica y contador coherente. La copia falla. El informe distingue la exposición del identificador de la resistencia de…</a:t>
             </a:r>
           </a:p>
         </p:txBody>
@@ -4256,7 +4737,7 @@
                   <a:srgbClr val="0B3D2E"/>
                 </a:solidFill>
               </a:rPr>
-              <a:t>🧰 Herramientas y preparación</a:t>
+              <a:t>📔 Glosario operativo</a:t>
             </a:r>
           </a:p>
         </p:txBody>
@@ -4294,82 +4775,82 @@
                   <a:srgbClr val="22282E"/>
                 </a:solidFill>
               </a:rPr>
-              <a:t>•  Proxmark3 (RDV4/Easy) con firmware Iceman, o ACR122U para NFC básico.</a:t>
-            </a:r>
-          </a:p>
-          <a:p>
-            <a:pPr>
-              <a:spcAft>
-                <a:spcPts val="600"/>
-              </a:spcAft>
-            </a:pPr>
-            <a:r>
-              <a:rPr sz="1500">
-                <a:solidFill>
-                  <a:srgbClr val="22282E"/>
-                </a:solidFill>
-              </a:rPr>
-              <a:t>•  libnfc/mfoc/mfcuk en Linux para MIFARE; NFC Tools en móvil.</a:t>
-            </a:r>
-          </a:p>
-          <a:p>
-            <a:pPr>
-              <a:spcAft>
-                <a:spcPts val="600"/>
-              </a:spcAft>
-            </a:pPr>
-            <a:r>
-              <a:rPr sz="1500">
-                <a:solidFill>
-                  <a:srgbClr val="22282E"/>
-                </a:solidFill>
-              </a:rPr>
-              <a:t>•  Tarjetas y tags propios; magic cards para pruebas de clonado.</a:t>
-            </a:r>
-          </a:p>
-          <a:p>
-            <a:pPr>
-              <a:spcAft>
-                <a:spcPts val="600"/>
-              </a:spcAft>
-            </a:pPr>
-            <a:r>
-              <a:rPr sz="1500">
-                <a:solidFill>
-                  <a:srgbClr val="22282E"/>
-                </a:solidFill>
-              </a:rPr>
-              <a:t>•  [usb] pm3 --&gt; hf search             # detectar tarjeta HF/NFC</a:t>
-            </a:r>
-          </a:p>
-          <a:p>
-            <a:pPr>
-              <a:spcAft>
-                <a:spcPts val="600"/>
-              </a:spcAft>
-            </a:pPr>
-            <a:r>
-              <a:rPr sz="1500">
-                <a:solidFill>
-                  <a:srgbClr val="22282E"/>
-                </a:solidFill>
-              </a:rPr>
-              <a:t>•  [usb] pm3 --&gt; lf search             # detectar tag LF</a:t>
-            </a:r>
-          </a:p>
-          <a:p>
-            <a:pPr>
-              <a:spcAft>
-                <a:spcPts val="600"/>
-              </a:spcAft>
-            </a:pPr>
-            <a:r>
-              <a:rPr sz="1500">
-                <a:solidFill>
-                  <a:srgbClr val="22282E"/>
-                </a:solidFill>
-              </a:rPr>
-              <a:t>•  [usb] pm3 --&gt; hf mf autopwn         # ataque automatizado (tarjeta propia)</a:t>
+              <a:t>•  Término — Definición útil</a:t>
+            </a:r>
+          </a:p>
+          <a:p>
+            <a:pPr>
+              <a:spcAft>
+                <a:spcPts val="600"/>
+              </a:spcAft>
+            </a:pPr>
+            <a:r>
+              <a:rPr sz="1500">
+                <a:solidFill>
+                  <a:srgbClr val="22282E"/>
+                </a:solidFill>
+              </a:rPr>
+              <a:t>•  UID — Identificador de tag; su estabilidad y seguridad dependen de tecnología.</a:t>
+            </a:r>
+          </a:p>
+          <a:p>
+            <a:pPr>
+              <a:spcAft>
+                <a:spcPts val="600"/>
+              </a:spcAft>
+            </a:pPr>
+            <a:r>
+              <a:rPr sz="1500">
+                <a:solidFill>
+                  <a:srgbClr val="22282E"/>
+                </a:solidFill>
+              </a:rPr>
+              <a:t>•  Anticolisión — Procedimiento para seleccionar tags presentes simultáneamente.</a:t>
+            </a:r>
+          </a:p>
+          <a:p>
+            <a:pPr>
+              <a:spcAft>
+                <a:spcPts val="600"/>
+              </a:spcAft>
+            </a:pPr>
+            <a:r>
+              <a:rPr sz="1500">
+                <a:solidFill>
+                  <a:srgbClr val="22282E"/>
+                </a:solidFill>
+              </a:rPr>
+              <a:t>•  Challenge-response — Autenticación que prueba conocimiento sin repetir una respuesta fija.</a:t>
+            </a:r>
+          </a:p>
+          <a:p>
+            <a:pPr>
+              <a:spcAft>
+                <a:spcPts val="600"/>
+              </a:spcAft>
+            </a:pPr>
+            <a:r>
+              <a:rPr sz="1500">
+                <a:solidFill>
+                  <a:srgbClr val="22282E"/>
+                </a:solidFill>
+              </a:rPr>
+              <a:t>•  Replay — Reutilización de una comunicación anterior.</a:t>
+            </a:r>
+          </a:p>
+          <a:p>
+            <a:pPr>
+              <a:spcAft>
+                <a:spcPts val="600"/>
+              </a:spcAft>
+            </a:pPr>
+            <a:r>
+              <a:rPr sz="1500">
+                <a:solidFill>
+                  <a:srgbClr val="22282E"/>
+                </a:solidFill>
+              </a:rPr>
+              <a:t>•  Sector/block — Organización de memoria presente en algunas familias de tarjetas.</a:t>
             </a:r>
           </a:p>
         </p:txBody>
@@ -4420,7 +4901,7 @@
                   <a:srgbClr val="0B3D2E"/>
                 </a:solidFill>
               </a:rPr>
-              <a:t>🧪 Laboratorio guiado</a:t>
+              <a:t>✅ Criterio de dominio</a:t>
             </a:r>
           </a:p>
         </p:txBody>
@@ -4458,97 +4939,7 @@
                   <a:srgbClr val="22282E"/>
                 </a:solidFill>
               </a:rPr>
-              <a:t>•  Identifica tus tags: con lf search y hf search determina la tecnología de tarjetas propias.</a:t>
-            </a:r>
-          </a:p>
-          <a:p>
-            <a:pPr>
-              <a:spcAft>
-                <a:spcPts val="600"/>
-              </a:spcAft>
-            </a:pPr>
-            <a:r>
-              <a:rPr sz="1500">
-                <a:solidFill>
-                  <a:srgbClr val="22282E"/>
-                </a:solidFill>
-              </a:rPr>
-              <a:t>•  LF simple: lee un EM4100 propio (lf em 410x reader) y observa que solo entrega un ID.</a:t>
-            </a:r>
-          </a:p>
-          <a:p>
-            <a:pPr>
-              <a:spcAft>
-                <a:spcPts val="600"/>
-              </a:spcAft>
-            </a:pPr>
-            <a:r>
-              <a:rPr sz="1500">
-                <a:solidFill>
-                  <a:srgbClr val="22282E"/>
-                </a:solidFill>
-              </a:rPr>
-              <a:t>•  HF/NFC: con hf 14a info obtén UID, ATQA/SAK y el tipo de MIFARE.</a:t>
-            </a:r>
-          </a:p>
-          <a:p>
-            <a:pPr>
-              <a:spcAft>
-                <a:spcPts val="600"/>
-              </a:spcAft>
-            </a:pPr>
-            <a:r>
-              <a:rPr sz="1500">
-                <a:solidFill>
-                  <a:srgbClr val="22282E"/>
-                </a:solidFill>
-              </a:rPr>
-              <a:t>•  Ataca MIFARE Classic (propia): ejecuta hf mf autopwn (o mfoc) para recuperar claves de los sectores.</a:t>
-            </a:r>
-          </a:p>
-          <a:p>
-            <a:pPr>
-              <a:spcAft>
-                <a:spcPts val="600"/>
-              </a:spcAft>
-            </a:pPr>
-            <a:r>
-              <a:rPr sz="1500">
-                <a:solidFill>
-                  <a:srgbClr val="22282E"/>
-                </a:solidFill>
-              </a:rPr>
-              <a:t>•  Vuelca la tarjeta: genera el dump completo y ábrelo para inspeccionar los datos de los bloques.</a:t>
-            </a:r>
-          </a:p>
-          <a:p>
-            <a:pPr>
-              <a:spcAft>
-                <a:spcPts val="600"/>
-              </a:spcAft>
-            </a:pPr>
-            <a:r>
-              <a:rPr sz="1500">
-                <a:solidFill>
-                  <a:srgbClr val="22282E"/>
-                </a:solidFill>
-              </a:rPr>
-              <a:t>•  Clona a magic card: escribe el dump y fija el UID en una magic card y verifica que el lector la reconoce igual.</a:t>
-            </a:r>
-          </a:p>
-          <a:p>
-            <a:pPr>
-              <a:spcAft>
-                <a:spcPts val="600"/>
-              </a:spcAft>
-            </a:pPr>
-            <a:r>
-              <a:rPr sz="1500">
-                <a:solidFill>
-                  <a:srgbClr val="22282E"/>
-                </a:solidFill>
-              </a:rPr>
-              <a:t>•  Analiza NTAG/NDEF: lee un tag NTAG213 propio y su registro NDEF con NFC Tools.</a:t>
+              <a:t>•  Existe dominio cuando el alumno identifica la tecnología, separa UID, memoria, criptografía y backend, reproduce una prueba solo con tarjetas propias y calibra la conclusión al control realmente…</a:t>
             </a:r>
           </a:p>
         </p:txBody>
@@ -4599,7 +4990,7 @@
                   <a:srgbClr val="0B3D2E"/>
                 </a:solidFill>
               </a:rPr>
-              <a:t>✍️ Ejercicios</a:t>
+              <a:t>📖 Definiciones y características</a:t>
             </a:r>
           </a:p>
         </p:txBody>
@@ -4637,82 +5028,82 @@
                   <a:srgbClr val="22282E"/>
                 </a:solidFill>
               </a:rPr>
-              <a:t>•  Identifica y clasifica tres tags propios por frecuencia y estándar.</a:t>
-            </a:r>
-          </a:p>
-          <a:p>
-            <a:pPr>
-              <a:spcAft>
-                <a:spcPts val="600"/>
-              </a:spcAft>
-            </a:pPr>
-            <a:r>
-              <a:rPr sz="1500">
-                <a:solidFill>
-                  <a:srgbClr val="22282E"/>
-                </a:solidFill>
-              </a:rPr>
-              <a:t>•  Extrae el ID de un tag LF EM4100 propio.</a:t>
-            </a:r>
-          </a:p>
-          <a:p>
-            <a:pPr>
-              <a:spcAft>
-                <a:spcPts val="600"/>
-              </a:spcAft>
-            </a:pPr>
-            <a:r>
-              <a:rPr sz="1500">
-                <a:solidFill>
-                  <a:srgbClr val="22282E"/>
-                </a:solidFill>
-              </a:rPr>
-              <a:t>•  Recupera las claves de una MIFARE Classic propia y explica qué ataque se usó.</a:t>
-            </a:r>
-          </a:p>
-          <a:p>
-            <a:pPr>
-              <a:spcAft>
-                <a:spcPts val="600"/>
-              </a:spcAft>
-            </a:pPr>
-            <a:r>
-              <a:rPr sz="1500">
-                <a:solidFill>
-                  <a:srgbClr val="22282E"/>
-                </a:solidFill>
-              </a:rPr>
-              <a:t>•  Vuelca y analiza los sectores de una tarjeta propia.</a:t>
-            </a:r>
-          </a:p>
-          <a:p>
-            <a:pPr>
-              <a:spcAft>
-                <a:spcPts val="600"/>
-              </a:spcAft>
-            </a:pPr>
-            <a:r>
-              <a:rPr sz="1500">
-                <a:solidFill>
-                  <a:srgbClr val="22282E"/>
-                </a:solidFill>
-              </a:rPr>
-              <a:t>•  Clona un tag propio a una magic card y verifica la lectura.</a:t>
-            </a:r>
-          </a:p>
-          <a:p>
-            <a:pPr>
-              <a:spcAft>
-                <a:spcPts val="600"/>
-              </a:spcAft>
-            </a:pPr>
-            <a:r>
-              <a:rPr sz="1500">
-                <a:solidFill>
-                  <a:srgbClr val="22282E"/>
-                </a:solidFill>
-              </a:rPr>
-              <a:t>•  Redacta tres recomendaciones para endurecer un sistema de acceso por proximidad.</a:t>
+              <a:t>•  RFID LF (125 kHz): tags simples tipo EM4100/HID Prox que suelen transmitir solo un ID sin cifrado. Característica: clonables trivialmente.</a:t>
+            </a:r>
+          </a:p>
+          <a:p>
+            <a:pPr>
+              <a:spcAft>
+                <a:spcPts val="600"/>
+              </a:spcAft>
+            </a:pPr>
+            <a:r>
+              <a:rPr sz="1500">
+                <a:solidFill>
+                  <a:srgbClr val="22282E"/>
+                </a:solidFill>
+              </a:rPr>
+              <a:t>•  NFC (13.56 MHz): subconjunto de HF para comunicación de corto alcance (pagos, tags NTAG). Característica: soportado por smartphones.</a:t>
+            </a:r>
+          </a:p>
+          <a:p>
+            <a:pPr>
+              <a:spcAft>
+                <a:spcPts val="600"/>
+              </a:spcAft>
+            </a:pPr>
+            <a:r>
+              <a:rPr sz="1500">
+                <a:solidFill>
+                  <a:srgbClr val="22282E"/>
+                </a:solidFill>
+              </a:rPr>
+              <a:t>•  MIFARE Classic: tarjeta HF con el cifrado propietario Crypto-1. Característica: roto; sus claves se recuperan en segundos/minutos.</a:t>
+            </a:r>
+          </a:p>
+          <a:p>
+            <a:pPr>
+              <a:spcAft>
+                <a:spcPts val="600"/>
+              </a:spcAft>
+            </a:pPr>
+            <a:r>
+              <a:rPr sz="1500">
+                <a:solidFill>
+                  <a:srgbClr val="22282E"/>
+                </a:solidFill>
+              </a:rPr>
+              <a:t>•  Proxmark3: herramienta versátil de lectura/escritura/emulación RFID LF y HF. Característica: soporta ataques a MIFARE y clonado.</a:t>
+            </a:r>
+          </a:p>
+          <a:p>
+            <a:pPr>
+              <a:spcAft>
+                <a:spcPts val="600"/>
+              </a:spcAft>
+            </a:pPr>
+            <a:r>
+              <a:rPr sz="1500">
+                <a:solidFill>
+                  <a:srgbClr val="22282E"/>
+                </a:solidFill>
+              </a:rPr>
+              <a:t>•  Ataque nested/darkside: técnicas que explotan debilidades de Crypto-1 para recuperar claves de sectores. Característica: requieren al menos una clave o son de fuerza reducida.</a:t>
+            </a:r>
+          </a:p>
+          <a:p>
+            <a:pPr>
+              <a:spcAft>
+                <a:spcPts val="600"/>
+              </a:spcAft>
+            </a:pPr>
+            <a:r>
+              <a:rPr sz="1500">
+                <a:solidFill>
+                  <a:srgbClr val="22282E"/>
+                </a:solidFill>
+              </a:rPr>
+              <a:t>•  Magic card: tarjeta con bloque 0 regrabable que permite fijar un UID arbitrario. Característica: usada para clonar MIFARE Classic.</a:t>
             </a:r>
           </a:p>
         </p:txBody>
@@ -4763,7 +5154,7 @@
                   <a:srgbClr val="0B3D2E"/>
                 </a:solidFill>
               </a:rPr>
-              <a:t>📝 Reto verificable</a:t>
+              <a:t>🧰 Herramientas y preparación</a:t>
             </a:r>
           </a:p>
         </p:txBody>
@@ -4801,7 +5192,37 @@
                   <a:srgbClr val="22282E"/>
                 </a:solidFill>
               </a:rPr>
-              <a:t>•  Recupera todas las claves de una tarjeta MIFARE Classic de tu propiedad, vuelca su contenido y clónala a una magic card. Criterio de aceptación: el clon es reconocido por el mismo lector que la original (mismo UID y datos), y documentas qué ataque recuperó las claves y por qué Crypto-1 lo hizo posible.</a:t>
+              <a:t>•  Proxmark3 (RDV4/Easy) con firmware Iceman, o ACR122U para NFC básico.</a:t>
+            </a:r>
+          </a:p>
+          <a:p>
+            <a:pPr>
+              <a:spcAft>
+                <a:spcPts val="600"/>
+              </a:spcAft>
+            </a:pPr>
+            <a:r>
+              <a:rPr sz="1500">
+                <a:solidFill>
+                  <a:srgbClr val="22282E"/>
+                </a:solidFill>
+              </a:rPr>
+              <a:t>•  libnfc/mfoc/mfcuk en Linux para MIFARE; NFC Tools en móvil.</a:t>
+            </a:r>
+          </a:p>
+          <a:p>
+            <a:pPr>
+              <a:spcAft>
+                <a:spcPts val="600"/>
+              </a:spcAft>
+            </a:pPr>
+            <a:r>
+              <a:rPr sz="1500">
+                <a:solidFill>
+                  <a:srgbClr val="22282E"/>
+                </a:solidFill>
+              </a:rPr>
+              <a:t>•  Tarjetas y tags propios; magic cards para pruebas de clonado.</a:t>
             </a:r>
           </a:p>
         </p:txBody>
